--- a/output/overlap-test.pptx
+++ b/output/overlap-test.pptx
@@ -139,7 +139,7 @@
           </c:tx>
           <c:spPr>
             <a:solidFill>
-              <a:srgbClr val="000000"/>
+              <a:srgbClr val="0066CC"/>
             </a:solidFill>
             <a:effectLst/>
           </c:spPr>
